--- a/test_fit/parameter_dependency.pptx
+++ b/test_fit/parameter_dependency.pptx
@@ -10,7 +10,6 @@
     <p:sldId id="279" r:id="rId4"/>
     <p:sldId id="280" r:id="rId5"/>
     <p:sldId id="281" r:id="rId6"/>
-    <p:sldId id="278" r:id="rId7"/>
   </p:sldIdLst>
   <p:sldSz cx="12192000" cy="6858000"/>
   <p:notesSz cx="6858000" cy="9144000"/>
@@ -109,6 +108,11 @@
       </a:defRPr>
     </a:lvl9pPr>
   </p:defaultTextStyle>
+  <p:extLst>
+    <p:ext uri="{EFAFB233-063F-42B5-8137-9DF3F51BA10A}">
+      <p15:sldGuideLst xmlns:p15="http://schemas.microsoft.com/office/powerpoint/2012/main"/>
+    </p:ext>
+  </p:extLst>
 </p:presentation>
 </file>
 
@@ -259,7 +263,7 @@
           <a:p>
             <a:fld id="{8DDDD884-4005-48B0-BA66-9591723C410A}" type="datetimeFigureOut">
               <a:rPr lang="zh-TW" altLang="en-US" smtClean="0"/>
-              <a:t>2025/7/10</a:t>
+              <a:t>2025/7/11</a:t>
             </a:fld>
             <a:endParaRPr lang="zh-TW" altLang="en-US"/>
           </a:p>
@@ -457,7 +461,7 @@
           <a:p>
             <a:fld id="{8DDDD884-4005-48B0-BA66-9591723C410A}" type="datetimeFigureOut">
               <a:rPr lang="zh-TW" altLang="en-US" smtClean="0"/>
-              <a:t>2025/7/10</a:t>
+              <a:t>2025/7/11</a:t>
             </a:fld>
             <a:endParaRPr lang="zh-TW" altLang="en-US"/>
           </a:p>
@@ -665,7 +669,7 @@
           <a:p>
             <a:fld id="{8DDDD884-4005-48B0-BA66-9591723C410A}" type="datetimeFigureOut">
               <a:rPr lang="zh-TW" altLang="en-US" smtClean="0"/>
-              <a:t>2025/7/10</a:t>
+              <a:t>2025/7/11</a:t>
             </a:fld>
             <a:endParaRPr lang="zh-TW" altLang="en-US"/>
           </a:p>
@@ -863,7 +867,7 @@
           <a:p>
             <a:fld id="{8DDDD884-4005-48B0-BA66-9591723C410A}" type="datetimeFigureOut">
               <a:rPr lang="zh-TW" altLang="en-US" smtClean="0"/>
-              <a:t>2025/7/10</a:t>
+              <a:t>2025/7/11</a:t>
             </a:fld>
             <a:endParaRPr lang="zh-TW" altLang="en-US"/>
           </a:p>
@@ -1138,7 +1142,7 @@
           <a:p>
             <a:fld id="{8DDDD884-4005-48B0-BA66-9591723C410A}" type="datetimeFigureOut">
               <a:rPr lang="zh-TW" altLang="en-US" smtClean="0"/>
-              <a:t>2025/7/10</a:t>
+              <a:t>2025/7/11</a:t>
             </a:fld>
             <a:endParaRPr lang="zh-TW" altLang="en-US"/>
           </a:p>
@@ -1403,7 +1407,7 @@
           <a:p>
             <a:fld id="{8DDDD884-4005-48B0-BA66-9591723C410A}" type="datetimeFigureOut">
               <a:rPr lang="zh-TW" altLang="en-US" smtClean="0"/>
-              <a:t>2025/7/10</a:t>
+              <a:t>2025/7/11</a:t>
             </a:fld>
             <a:endParaRPr lang="zh-TW" altLang="en-US"/>
           </a:p>
@@ -1815,7 +1819,7 @@
           <a:p>
             <a:fld id="{8DDDD884-4005-48B0-BA66-9591723C410A}" type="datetimeFigureOut">
               <a:rPr lang="zh-TW" altLang="en-US" smtClean="0"/>
-              <a:t>2025/7/10</a:t>
+              <a:t>2025/7/11</a:t>
             </a:fld>
             <a:endParaRPr lang="zh-TW" altLang="en-US"/>
           </a:p>
@@ -1956,7 +1960,7 @@
           <a:p>
             <a:fld id="{8DDDD884-4005-48B0-BA66-9591723C410A}" type="datetimeFigureOut">
               <a:rPr lang="zh-TW" altLang="en-US" smtClean="0"/>
-              <a:t>2025/7/10</a:t>
+              <a:t>2025/7/11</a:t>
             </a:fld>
             <a:endParaRPr lang="zh-TW" altLang="en-US"/>
           </a:p>
@@ -2069,7 +2073,7 @@
           <a:p>
             <a:fld id="{8DDDD884-4005-48B0-BA66-9591723C410A}" type="datetimeFigureOut">
               <a:rPr lang="zh-TW" altLang="en-US" smtClean="0"/>
-              <a:t>2025/7/10</a:t>
+              <a:t>2025/7/11</a:t>
             </a:fld>
             <a:endParaRPr lang="zh-TW" altLang="en-US"/>
           </a:p>
@@ -2380,7 +2384,7 @@
           <a:p>
             <a:fld id="{8DDDD884-4005-48B0-BA66-9591723C410A}" type="datetimeFigureOut">
               <a:rPr lang="zh-TW" altLang="en-US" smtClean="0"/>
-              <a:t>2025/7/10</a:t>
+              <a:t>2025/7/11</a:t>
             </a:fld>
             <a:endParaRPr lang="zh-TW" altLang="en-US"/>
           </a:p>
@@ -2668,7 +2672,7 @@
           <a:p>
             <a:fld id="{8DDDD884-4005-48B0-BA66-9591723C410A}" type="datetimeFigureOut">
               <a:rPr lang="zh-TW" altLang="en-US" smtClean="0"/>
-              <a:t>2025/7/10</a:t>
+              <a:t>2025/7/11</a:t>
             </a:fld>
             <a:endParaRPr lang="zh-TW" altLang="en-US"/>
           </a:p>
@@ -2909,7 +2913,7 @@
           <a:p>
             <a:fld id="{8DDDD884-4005-48B0-BA66-9591723C410A}" type="datetimeFigureOut">
               <a:rPr lang="zh-TW" altLang="en-US" smtClean="0"/>
-              <a:t>2025/7/10</a:t>
+              <a:t>2025/7/11</a:t>
             </a:fld>
             <a:endParaRPr lang="zh-TW" altLang="en-US"/>
           </a:p>
@@ -3663,12 +3667,6 @@
                                 </m:ctrlPr>
                               </m:fPr>
                               <m:num>
-                                <m:r>
-                                  <a:rPr lang="en-US" altLang="zh-TW" sz="2400" i="1">
-                                    <a:latin typeface="Cambria Math" panose="02040503050406030204" pitchFamily="18" charset="0"/>
-                                  </a:rPr>
-                                  <m:t>𝑐</m:t>
-                                </m:r>
                                 <m:sSub>
                                   <m:sSubPr>
                                     <m:ctrlPr>
@@ -3699,25 +3697,25 @@
                                 <m:sSub>
                                   <m:sSubPr>
                                     <m:ctrlPr>
-                                      <a:rPr lang="en-US" altLang="zh-TW" sz="2400" i="1">
+                                      <a:rPr lang="en-US" altLang="zh-TW" sz="2400" b="0" i="1" smtClean="0">
                                         <a:latin typeface="Cambria Math" panose="02040503050406030204" pitchFamily="18" charset="0"/>
                                       </a:rPr>
                                     </m:ctrlPr>
                                   </m:sSubPr>
                                   <m:e>
                                     <m:r>
-                                      <a:rPr lang="en-US" altLang="zh-TW" sz="2400" i="1">
+                                      <a:rPr lang="en-US" altLang="zh-TW" sz="2400" b="0" i="1" smtClean="0">
                                         <a:latin typeface="Cambria Math" panose="02040503050406030204" pitchFamily="18" charset="0"/>
                                       </a:rPr>
-                                      <m:t>𝑛</m:t>
+                                      <m:t>𝑡</m:t>
                                     </m:r>
                                   </m:e>
                                   <m:sub>
                                     <m:r>
-                                      <a:rPr lang="en-US" altLang="zh-TW" sz="2400" i="1">
+                                      <a:rPr lang="en-US" altLang="zh-TW" sz="2400" b="0" i="1" smtClean="0">
                                         <a:latin typeface="Cambria Math" panose="02040503050406030204" pitchFamily="18" charset="0"/>
                                       </a:rPr>
-                                      <m:t>𝑔</m:t>
+                                      <m:t>𝑟</m:t>
                                     </m:r>
                                   </m:sub>
                                 </m:sSub>
@@ -3734,7 +3732,7 @@
                                       <a:rPr lang="en-US" altLang="zh-TW" sz="2400" i="1">
                                         <a:latin typeface="Cambria Math" panose="02040503050406030204" pitchFamily="18" charset="0"/>
                                       </a:rPr>
-                                      <m:t>𝐿𝐴</m:t>
+                                      <m:t>𝐴</m:t>
                                     </m:r>
                                   </m:e>
                                   <m:sub>
@@ -4073,6 +4071,18 @@
                                   </m:r>
                                 </m:sub>
                               </m:sSub>
+                              <m:r>
+                                <a:rPr lang="en-US" altLang="zh-TW" sz="2000" i="1">
+                                  <a:latin typeface="Cambria Math" panose="02040503050406030204" pitchFamily="18" charset="0"/>
+                                </a:rPr>
+                                <m:t>/</m:t>
+                              </m:r>
+                              <m:r>
+                                <a:rPr lang="en-US" altLang="zh-TW" sz="2000" i="1">
+                                  <a:latin typeface="Cambria Math" panose="02040503050406030204" pitchFamily="18" charset="0"/>
+                                </a:rPr>
+                                <m:t>2</m:t>
+                              </m:r>
                               <m:r>
                                 <a:rPr lang="en-US" altLang="zh-TW" sz="2000" i="1">
                                   <a:latin typeface="Cambria Math" panose="02040503050406030204" pitchFamily="18" charset="0"/>
@@ -4431,8 +4441,8 @@
           </p:sp>
         </mc:Fallback>
       </mc:AlternateContent>
-      <mc:AlternateContent xmlns:mc="http://schemas.openxmlformats.org/markup-compatibility/2006">
-        <mc:Choice xmlns:a14="http://schemas.microsoft.com/office/drawing/2010/main" Requires="a14">
+      <mc:AlternateContent xmlns:mc="http://schemas.openxmlformats.org/markup-compatibility/2006" xmlns:a14="http://schemas.microsoft.com/office/drawing/2010/main">
+        <mc:Choice Requires="a14">
           <p:sp>
             <p:nvSpPr>
               <p:cNvPr id="8" name="文字方塊 7">
@@ -4695,7 +4705,6 @@
                 <a:endParaRPr lang="en-US" altLang="zh-TW" sz="2400" dirty="0"/>
               </a:p>
               <a:p>
-                <a:pPr/>
                 <a:r>
                   <a:rPr lang="en-US" altLang="zh-TW" sz="2400" dirty="0"/>
                   <a:t>(refer: Multi </a:t>
@@ -4736,7 +4745,7 @@
             </p:txBody>
           </p:sp>
         </mc:Choice>
-        <mc:Fallback>
+        <mc:Fallback xmlns="">
           <p:sp>
             <p:nvSpPr>
               <p:cNvPr id="8" name="文字方塊 7">
@@ -4781,8 +4790,8 @@
           </p:sp>
         </mc:Fallback>
       </mc:AlternateContent>
-      <mc:AlternateContent xmlns:mc="http://schemas.openxmlformats.org/markup-compatibility/2006">
-        <mc:Choice xmlns:a14="http://schemas.microsoft.com/office/drawing/2010/main" Requires="a14">
+      <mc:AlternateContent xmlns:mc="http://schemas.openxmlformats.org/markup-compatibility/2006" xmlns:a14="http://schemas.microsoft.com/office/drawing/2010/main">
+        <mc:Choice Requires="a14">
           <p:sp>
             <p:nvSpPr>
               <p:cNvPr id="10" name="文字方塊 9">
@@ -5282,7 +5291,6 @@
                 <a:endParaRPr lang="en-US" altLang="zh-TW" sz="2000" b="0" dirty="0"/>
               </a:p>
               <a:p>
-                <a:pPr/>
                 <a:r>
                   <a:rPr lang="en-US" altLang="zh-TW" sz="2000" dirty="0"/>
                   <a:t>(refer: Multi </a:t>
@@ -5321,13 +5329,12 @@
                 </a:r>
               </a:p>
               <a:p>
-                <a:pPr/>
                 <a:endParaRPr lang="zh-TW" altLang="en-US" sz="2000" dirty="0"/>
               </a:p>
             </p:txBody>
           </p:sp>
         </mc:Choice>
-        <mc:Fallback>
+        <mc:Fallback xmlns="">
           <p:sp>
             <p:nvSpPr>
               <p:cNvPr id="10" name="文字方塊 9">
@@ -5437,8 +5444,8 @@
           </a:p>
         </p:txBody>
       </p:sp>
-      <mc:AlternateContent xmlns:mc="http://schemas.openxmlformats.org/markup-compatibility/2006">
-        <mc:Choice xmlns:a14="http://schemas.microsoft.com/office/drawing/2010/main" Requires="a14">
+      <mc:AlternateContent xmlns:mc="http://schemas.openxmlformats.org/markup-compatibility/2006" xmlns:a14="http://schemas.microsoft.com/office/drawing/2010/main">
+        <mc:Choice Requires="a14">
           <p:sp>
             <p:nvSpPr>
               <p:cNvPr id="3" name="內容版面配置區 2">
@@ -6088,7 +6095,7 @@
                         <a:rPr lang="en-US" altLang="zh-TW" sz="2000" b="0" i="1" smtClean="0">
                           <a:latin typeface="Cambria Math" panose="02040503050406030204" pitchFamily="18" charset="0"/>
                         </a:rPr>
-                        <m:t>-09 </m:t>
+                        <m:t>−09 </m:t>
                       </m:r>
                       <m:r>
                         <a:rPr lang="en-US" altLang="zh-TW" sz="2000" b="0" i="1" smtClean="0">
@@ -6359,7 +6366,7 @@
             </p:txBody>
           </p:sp>
         </mc:Choice>
-        <mc:Fallback>
+        <mc:Fallback xmlns="">
           <p:sp>
             <p:nvSpPr>
               <p:cNvPr id="3" name="內容版面配置區 2">
@@ -6433,8 +6440,8 @@
           <a:chExt cx="0" cy="0"/>
         </a:xfrm>
       </p:grpSpPr>
-      <mc:AlternateContent xmlns:mc="http://schemas.openxmlformats.org/markup-compatibility/2006">
-        <mc:Choice xmlns:a14="http://schemas.microsoft.com/office/drawing/2010/main" Requires="a14">
+      <mc:AlternateContent xmlns:mc="http://schemas.openxmlformats.org/markup-compatibility/2006" xmlns:a14="http://schemas.microsoft.com/office/drawing/2010/main">
+        <mc:Choice Requires="a14">
           <p:sp>
             <p:nvSpPr>
               <p:cNvPr id="5" name="文字方塊 4">
@@ -6463,7 +6470,6 @@
               </a:bodyPr>
               <a:lstStyle/>
               <a:p>
-                <a:pPr/>
                 <a14:m>
                   <m:oMath xmlns:m="http://schemas.openxmlformats.org/officeDocument/2006/math">
                     <m:sSub>
@@ -6511,7 +6517,6 @@
                 </a:r>
               </a:p>
               <a:p>
-                <a:pPr/>
                 <a:endParaRPr lang="en-US" altLang="zh-TW" sz="2000" dirty="0"/>
               </a:p>
               <a:p>
@@ -6556,11 +6561,9 @@
                 </a:r>
               </a:p>
               <a:p>
-                <a:pPr/>
                 <a:endParaRPr lang="en-US" altLang="zh-TW" sz="2000" dirty="0"/>
               </a:p>
               <a:p>
-                <a:pPr/>
                 <a14:m>
                   <m:oMath xmlns:m="http://schemas.openxmlformats.org/officeDocument/2006/math">
                     <m:sSub>
@@ -6600,11 +6603,9 @@
                 </a:r>
               </a:p>
               <a:p>
-                <a:pPr/>
                 <a:endParaRPr lang="en-US" altLang="zh-TW" sz="2000" dirty="0"/>
               </a:p>
               <a:p>
-                <a:pPr/>
                 <a14:m>
                   <m:oMath xmlns:m="http://schemas.openxmlformats.org/officeDocument/2006/math">
                     <m:sSub>
@@ -6654,7 +6655,6 @@
                 </a:r>
               </a:p>
               <a:p>
-                <a:pPr/>
                 <a:r>
                   <a:rPr lang="en-US" altLang="zh-TW" sz="2000" dirty="0"/>
                   <a:t>(refer: Measurement of the Nonlinear Loss and Effective Free Carrier Lifetime in Silicon </a:t>
@@ -6697,11 +6697,9 @@
                 </a:r>
               </a:p>
               <a:p>
-                <a:pPr/>
                 <a:endParaRPr lang="en-US" altLang="zh-TW" sz="2000" dirty="0"/>
               </a:p>
               <a:p>
-                <a:pPr/>
                 <a14:m>
                   <m:oMath xmlns:m="http://schemas.openxmlformats.org/officeDocument/2006/math">
                     <m:sSub>
@@ -6743,7 +6741,6 @@
                 </a:r>
               </a:p>
               <a:p>
-                <a:pPr/>
                 <a:r>
                   <a:rPr lang="en-US" altLang="zh-TW" sz="2000" dirty="0"/>
                   <a:t> (refer: Multi </a:t>
@@ -6766,11 +6763,9 @@
                 </a:r>
               </a:p>
               <a:p>
-                <a:pPr/>
                 <a:endParaRPr lang="en-US" altLang="zh-TW" sz="2000" dirty="0"/>
               </a:p>
               <a:p>
-                <a:pPr/>
                 <a14:m>
                   <m:oMath xmlns:m="http://schemas.openxmlformats.org/officeDocument/2006/math">
                     <m:sSub>
@@ -6812,7 +6807,6 @@
                 </a:r>
               </a:p>
               <a:p>
-                <a:pPr/>
                 <a:r>
                   <a:rPr lang="en-US" altLang="zh-TW" sz="2000" dirty="0"/>
                   <a:t>(refer: Measurement of the Nonlinear Loss and Effective Free Carrier Lifetime in Silicon </a:t>
@@ -6835,11 +6829,9 @@
                 </a:r>
               </a:p>
               <a:p>
-                <a:pPr/>
                 <a:endParaRPr lang="en-US" altLang="zh-TW" sz="2000" dirty="0"/>
               </a:p>
               <a:p>
-                <a:pPr/>
                 <a:r>
                   <a:rPr lang="en-US" altLang="zh-TW" sz="2000" dirty="0"/>
                   <a:t>N</a:t>
@@ -6854,11 +6846,9 @@
                 </a:r>
               </a:p>
               <a:p>
-                <a:pPr/>
                 <a:endParaRPr lang="en-US" altLang="zh-TW" sz="2000" dirty="0"/>
               </a:p>
               <a:p>
-                <a:pPr/>
                 <a14:m>
                   <m:oMath xmlns:m="http://schemas.openxmlformats.org/officeDocument/2006/math">
                     <m:sSub>
@@ -6898,13 +6888,12 @@
                 </a:r>
               </a:p>
               <a:p>
-                <a:pPr/>
                 <a:endParaRPr lang="zh-TW" altLang="en-US" sz="2000" dirty="0"/>
               </a:p>
             </p:txBody>
           </p:sp>
         </mc:Choice>
-        <mc:Fallback>
+        <mc:Fallback xmlns="">
           <p:sp>
             <p:nvSpPr>
               <p:cNvPr id="5" name="文字方塊 4">
@@ -6996,7 +6985,7 @@
             <p:spPr>
               <a:xfrm>
                 <a:off x="232610" y="236439"/>
-                <a:ext cx="10098505" cy="6762557"/>
+                <a:ext cx="10098505" cy="7316555"/>
               </a:xfrm>
               <a:prstGeom prst="rect">
                 <a:avLst/>
@@ -7009,7 +6998,6 @@
               </a:bodyPr>
               <a:lstStyle/>
               <a:p>
-                <a:pPr/>
                 <a14:m>
                   <m:oMath xmlns:m="http://schemas.openxmlformats.org/officeDocument/2006/math">
                     <m:sSub>
@@ -7051,15 +7039,9 @@
                 </a:r>
               </a:p>
               <a:p>
-                <a:pPr/>
                 <a:endParaRPr lang="en-US" altLang="zh-TW" dirty="0"/>
               </a:p>
               <a:p>
-                <a:pPr/>
-                <a:endParaRPr lang="en-US" altLang="zh-TW" dirty="0"/>
-              </a:p>
-              <a:p>
-                <a:pPr/>
                 <a14:m>
                   <m:oMath xmlns:m="http://schemas.openxmlformats.org/officeDocument/2006/math">
                     <m:sSub>
@@ -7099,7 +7081,6 @@
                 </a:r>
               </a:p>
               <a:p>
-                <a:pPr/>
                 <a:r>
                   <a:rPr lang="en-US" altLang="zh-TW" dirty="0"/>
                   <a:t>(refer: Multi </a:t>
@@ -7122,11 +7103,9 @@
                 </a:r>
               </a:p>
               <a:p>
-                <a:pPr/>
                 <a:endParaRPr lang="en-US" altLang="zh-TW" dirty="0"/>
               </a:p>
               <a:p>
-                <a:pPr/>
                 <a14:m>
                   <m:oMath xmlns:m="http://schemas.openxmlformats.org/officeDocument/2006/math">
                     <m:sSub>
@@ -7174,7 +7153,6 @@
                 </a:r>
               </a:p>
               <a:p>
-                <a:pPr/>
                 <a:r>
                   <a:rPr lang="en-US" altLang="zh-TW" dirty="0"/>
                   <a:t>(refer: Multi </a:t>
@@ -7197,11 +7175,9 @@
                 </a:r>
               </a:p>
               <a:p>
-                <a:pPr/>
                 <a:endParaRPr lang="en-US" altLang="zh-TW" dirty="0"/>
               </a:p>
               <a:p>
-                <a:pPr/>
                 <a14:m>
                   <m:oMath xmlns:m="http://schemas.openxmlformats.org/officeDocument/2006/math">
                     <m:sSub>
@@ -7249,11 +7225,9 @@
                 </a:r>
               </a:p>
               <a:p>
-                <a:pPr/>
                 <a:endParaRPr lang="en-US" altLang="zh-TW" dirty="0"/>
               </a:p>
               <a:p>
-                <a:pPr/>
                 <a14:m>
                   <m:oMath xmlns:m="http://schemas.openxmlformats.org/officeDocument/2006/math">
                     <m:sSub>
@@ -7293,11 +7267,9 @@
                 </a:r>
               </a:p>
               <a:p>
-                <a:pPr/>
                 <a:endParaRPr lang="en-US" altLang="zh-TW" dirty="0"/>
               </a:p>
               <a:p>
-                <a:pPr/>
                 <a14:m>
                   <m:oMath xmlns:m="http://schemas.openxmlformats.org/officeDocument/2006/math">
                     <m:r>
@@ -7332,11 +7304,9 @@
                 </a:r>
               </a:p>
               <a:p>
-                <a:pPr/>
                 <a:endParaRPr lang="en-US" altLang="zh-TW" dirty="0"/>
               </a:p>
               <a:p>
-                <a:pPr/>
                 <a14:m>
                   <m:oMath xmlns:m="http://schemas.openxmlformats.org/officeDocument/2006/math">
                     <m:sSub>
@@ -7376,7 +7346,6 @@
                 </a:r>
               </a:p>
               <a:p>
-                <a:pPr/>
                 <a:r>
                   <a:rPr lang="en-US" altLang="zh-TW" dirty="0"/>
                   <a:t> (refer: Multi </a:t>
@@ -7399,22 +7368,76 @@
                 </a:r>
               </a:p>
               <a:p>
-                <a:pPr/>
+                <a14:m>
+                  <m:oMath xmlns:m="http://schemas.openxmlformats.org/officeDocument/2006/math">
+                    <m:sSub>
+                      <m:sSubPr>
+                        <m:ctrlPr>
+                          <a:rPr lang="en-US" altLang="zh-TW" i="1">
+                            <a:latin typeface="Cambria Math" panose="02040503050406030204" pitchFamily="18" charset="0"/>
+                          </a:rPr>
+                        </m:ctrlPr>
+                      </m:sSubPr>
+                      <m:e>
+                        <m:r>
+                          <a:rPr lang="en-US" altLang="zh-TW" i="1">
+                            <a:latin typeface="Cambria Math" panose="02040503050406030204" pitchFamily="18" charset="0"/>
+                          </a:rPr>
+                          <m:t>𝐴</m:t>
+                        </m:r>
+                      </m:e>
+                      <m:sub>
+                        <m:r>
+                          <a:rPr lang="en-US" altLang="zh-TW" b="0" i="1" smtClean="0">
+                            <a:latin typeface="Cambria Math" panose="02040503050406030204" pitchFamily="18" charset="0"/>
+                          </a:rPr>
+                          <m:t>𝑒𝑓𝑓</m:t>
+                        </m:r>
+                      </m:sub>
+                    </m:sSub>
+                  </m:oMath>
+                </a14:m>
+                <a:r>
+                  <a:rPr lang="zh-TW" altLang="en-US" dirty="0"/>
+                  <a:t>：</a:t>
+                </a:r>
+                <a:r>
+                  <a:rPr lang="en-US" altLang="zh-TW" dirty="0"/>
+                  <a:t> effective cross section of Free carrier absorption (0.116 um^2)</a:t>
+                </a:r>
+              </a:p>
+              <a:p>
+                <a:r>
+                  <a:rPr lang="en-US" altLang="zh-TW" dirty="0"/>
+                  <a:t> (refer: Multi </a:t>
+                </a:r>
+                <a:r>
+                  <a:rPr lang="en-US" altLang="zh-TW" dirty="0" err="1"/>
+                  <a:t>bistability</a:t>
+                </a:r>
+                <a:r>
+                  <a:rPr lang="en-US" altLang="zh-TW" dirty="0"/>
+                  <a:t> and self-pulsation in nonlinear high- Q silicon </a:t>
+                </a:r>
+                <a:r>
+                  <a:rPr lang="en-US" altLang="zh-TW" dirty="0" err="1"/>
+                  <a:t>microring</a:t>
+                </a:r>
+                <a:r>
+                  <a:rPr lang="en-US" altLang="zh-TW" dirty="0"/>
+                  <a:t> resonators considering thermo-optical effect. TABLE. 1)</a:t>
+                </a:r>
+              </a:p>
+              <a:p>
+                <a:r>
+                  <a:rPr lang="en-US" altLang="zh-TW" dirty="0"/>
+                  <a:t>Q = 2325.6759128051194</a:t>
+                </a:r>
+              </a:p>
+              <a:p>
                 <a:endParaRPr lang="en-US" altLang="zh-TW" dirty="0"/>
               </a:p>
               <a:p>
-                <a:pPr/>
-                <a:r>
-                  <a:rPr lang="en-US" altLang="zh-TW" dirty="0"/>
-                  <a:t>Q = 2325.6759128051194</a:t>
-                </a:r>
-              </a:p>
-              <a:p>
-                <a:pPr/>
-                <a:endParaRPr lang="en-US" altLang="zh-TW" dirty="0"/>
-              </a:p>
-              <a:p>
-                <a:pPr/>
                 <a:endParaRPr lang="zh-TW" altLang="en-US" dirty="0"/>
               </a:p>
             </p:txBody>
@@ -7438,7 +7461,7 @@
             <p:spPr>
               <a:xfrm>
                 <a:off x="232610" y="236439"/>
-                <a:ext cx="10098505" cy="6762557"/>
+                <a:ext cx="10098505" cy="7316555"/>
               </a:xfrm>
               <a:prstGeom prst="rect">
                 <a:avLst/>
@@ -7446,7 +7469,7 @@
               <a:blipFill>
                 <a:blip r:embed="rId2"/>
                 <a:stretch>
-                  <a:fillRect l="-483" t="-541"/>
+                  <a:fillRect l="-483" t="-500"/>
                 </a:stretch>
               </a:blipFill>
             </p:spPr>
@@ -7469,643 +7492,6 @@
     <p:extLst>
       <p:ext uri="{BB962C8B-B14F-4D97-AF65-F5344CB8AC3E}">
         <p14:creationId xmlns:p14="http://schemas.microsoft.com/office/powerpoint/2010/main" val="1147414919"/>
-      </p:ext>
-    </p:extLst>
-  </p:cSld>
-  <p:clrMapOvr>
-    <a:masterClrMapping/>
-  </p:clrMapOvr>
-</p:sld>
-</file>
-
-<file path=ppt/slides/slide6.xml><?xml version="1.0" encoding="utf-8"?>
-<p:sld xmlns:a="http://schemas.openxmlformats.org/drawingml/2006/main" xmlns:r="http://schemas.openxmlformats.org/officeDocument/2006/relationships" xmlns:p="http://schemas.openxmlformats.org/presentationml/2006/main">
-  <p:cSld>
-    <p:spTree>
-      <p:nvGrpSpPr>
-        <p:cNvPr id="1" name=""/>
-        <p:cNvGrpSpPr/>
-        <p:nvPr/>
-      </p:nvGrpSpPr>
-      <p:grpSpPr>
-        <a:xfrm>
-          <a:off x="0" y="0"/>
-          <a:ext cx="0" cy="0"/>
-          <a:chOff x="0" y="0"/>
-          <a:chExt cx="0" cy="0"/>
-        </a:xfrm>
-      </p:grpSpPr>
-      <p:sp>
-        <p:nvSpPr>
-          <p:cNvPr id="2" name="標題 1">
-            <a:extLst>
-              <a:ext uri="{FF2B5EF4-FFF2-40B4-BE49-F238E27FC236}">
-                <a16:creationId xmlns:a16="http://schemas.microsoft.com/office/drawing/2014/main" id="{D8A57E3E-0C53-DC60-BF09-9C8C3FA546B9}"/>
-              </a:ext>
-            </a:extLst>
-          </p:cNvPr>
-          <p:cNvSpPr>
-            <a:spLocks noGrp="1"/>
-          </p:cNvSpPr>
-          <p:nvPr>
-            <p:ph type="title"/>
-          </p:nvPr>
-        </p:nvSpPr>
-        <p:spPr>
-          <a:xfrm>
-            <a:off x="428625" y="252412"/>
-            <a:ext cx="10515600" cy="225425"/>
-          </a:xfrm>
-        </p:spPr>
-        <p:txBody>
-          <a:bodyPr>
-            <a:normAutofit fontScale="90000"/>
-          </a:bodyPr>
-          <a:lstStyle/>
-          <a:p>
-            <a:r>
-              <a:rPr lang="en-US" altLang="zh-TW" dirty="0"/>
-              <a:t>fit </a:t>
-            </a:r>
-            <a:r>
-              <a:rPr lang="zh-TW" altLang="en-US" dirty="0"/>
-              <a:t>參數</a:t>
-            </a:r>
-          </a:p>
-        </p:txBody>
-      </p:sp>
-      <mc:AlternateContent xmlns:mc="http://schemas.openxmlformats.org/markup-compatibility/2006" xmlns:a14="http://schemas.microsoft.com/office/drawing/2010/main">
-        <mc:Choice Requires="a14">
-          <p:sp>
-            <p:nvSpPr>
-              <p:cNvPr id="4" name="內容版面配置區 3">
-                <a:extLst>
-                  <a:ext uri="{FF2B5EF4-FFF2-40B4-BE49-F238E27FC236}">
-                    <a16:creationId xmlns:a16="http://schemas.microsoft.com/office/drawing/2014/main" id="{1BF1B269-115C-83CE-4E15-5B99EB0D045A}"/>
-                  </a:ext>
-                </a:extLst>
-              </p:cNvPr>
-              <p:cNvSpPr txBox="1">
-                <a:spLocks noGrp="1"/>
-              </p:cNvSpPr>
-              <p:nvPr>
-                <p:ph idx="1"/>
-              </p:nvPr>
-            </p:nvSpPr>
-            <p:spPr>
-              <a:xfrm>
-                <a:off x="609600" y="1337361"/>
-                <a:ext cx="10429875" cy="5155514"/>
-              </a:xfrm>
-              <a:prstGeom prst="rect">
-                <a:avLst/>
-              </a:prstGeom>
-              <a:noFill/>
-            </p:spPr>
-            <p:txBody>
-              <a:bodyPr wrap="square" rtlCol="0">
-                <a:spAutoFit/>
-              </a:bodyPr>
-              <a:lstStyle/>
-              <a:p>
-                <a14:m>
-                  <m:oMath xmlns:m="http://schemas.openxmlformats.org/officeDocument/2006/math">
-                    <m:sSub>
-                      <m:sSubPr>
-                        <m:ctrlPr>
-                          <a:rPr lang="en-US" altLang="zh-TW" b="0" i="1" smtClean="0">
-                            <a:solidFill>
-                              <a:srgbClr val="FF0000"/>
-                            </a:solidFill>
-                            <a:latin typeface="Cambria Math" panose="02040503050406030204" pitchFamily="18" charset="0"/>
-                          </a:rPr>
-                        </m:ctrlPr>
-                      </m:sSubPr>
-                      <m:e>
-                        <m:r>
-                          <a:rPr lang="en-US" altLang="zh-TW" b="0" i="1" smtClean="0">
-                            <a:solidFill>
-                              <a:srgbClr val="FF0000"/>
-                            </a:solidFill>
-                            <a:latin typeface="Cambria Math" panose="02040503050406030204" pitchFamily="18" charset="0"/>
-                          </a:rPr>
-                          <m:t>𝜏</m:t>
-                        </m:r>
-                      </m:e>
-                      <m:sub>
-                        <m:r>
-                          <a:rPr lang="en-US" altLang="zh-TW" b="0" i="1" smtClean="0">
-                            <a:solidFill>
-                              <a:srgbClr val="FF0000"/>
-                            </a:solidFill>
-                            <a:latin typeface="Cambria Math" panose="02040503050406030204" pitchFamily="18" charset="0"/>
-                          </a:rPr>
-                          <m:t>𝑒𝑓𝑓</m:t>
-                        </m:r>
-                      </m:sub>
-                    </m:sSub>
-                    <m:r>
-                      <a:rPr lang="en-US" altLang="zh-TW" b="0" i="1" smtClean="0">
-                        <a:solidFill>
-                          <a:srgbClr val="FF0000"/>
-                        </a:solidFill>
-                        <a:latin typeface="Cambria Math" panose="02040503050406030204" pitchFamily="18" charset="0"/>
-                      </a:rPr>
-                      <m:t>=0.5</m:t>
-                    </m:r>
-                    <m:r>
-                      <a:rPr lang="en-US" altLang="zh-TW" b="0" i="1" smtClean="0">
-                        <a:solidFill>
-                          <a:srgbClr val="FF0000"/>
-                        </a:solidFill>
-                        <a:latin typeface="Cambria Math" panose="02040503050406030204" pitchFamily="18" charset="0"/>
-                      </a:rPr>
-                      <m:t>𝑛𝑠</m:t>
-                    </m:r>
-                  </m:oMath>
-                </a14:m>
-                <a:r>
-                  <a:rPr lang="en-US" altLang="zh-TW" b="0" dirty="0">
-                    <a:solidFill>
-                      <a:srgbClr val="FF0000"/>
-                    </a:solidFill>
-                  </a:rPr>
-                  <a:t>,</a:t>
-                </a:r>
-                <a14:m>
-                  <m:oMath xmlns:m="http://schemas.openxmlformats.org/officeDocument/2006/math">
-                    <m:r>
-                      <a:rPr lang="en-US" altLang="zh-TW" b="0" i="1" dirty="0" smtClean="0">
-                        <a:solidFill>
-                          <a:srgbClr val="FF0000"/>
-                        </a:solidFill>
-                        <a:latin typeface="Cambria Math" panose="02040503050406030204" pitchFamily="18" charset="0"/>
-                      </a:rPr>
-                      <m:t> </m:t>
-                    </m:r>
-                    <m:r>
-                      <a:rPr lang="en-US" altLang="zh-TW" b="0" i="1" dirty="0" smtClean="0">
-                        <a:latin typeface="Cambria Math" panose="02040503050406030204" pitchFamily="18" charset="0"/>
-                      </a:rPr>
-                      <m:t>(</m:t>
-                    </m:r>
-                    <m:r>
-                      <a:rPr lang="en-US" altLang="zh-TW" b="0" i="1" dirty="0" smtClean="0">
-                        <a:latin typeface="Cambria Math" panose="02040503050406030204" pitchFamily="18" charset="0"/>
-                      </a:rPr>
-                      <m:t>𝑓𝑟𝑒𝑒</m:t>
-                    </m:r>
-                    <m:r>
-                      <a:rPr lang="en-US" altLang="zh-TW" b="0" i="1" dirty="0" smtClean="0">
-                        <a:latin typeface="Cambria Math" panose="02040503050406030204" pitchFamily="18" charset="0"/>
-                      </a:rPr>
-                      <m:t> </m:t>
-                    </m:r>
-                    <m:r>
-                      <a:rPr lang="en-US" altLang="zh-TW" b="0" i="1" dirty="0" smtClean="0">
-                        <a:latin typeface="Cambria Math" panose="02040503050406030204" pitchFamily="18" charset="0"/>
-                      </a:rPr>
-                      <m:t>𝑐𝑎𝑟𝑟𝑖𝑒𝑟</m:t>
-                    </m:r>
-                    <m:r>
-                      <a:rPr lang="en-US" altLang="zh-TW" b="0" i="1" dirty="0" smtClean="0">
-                        <a:latin typeface="Cambria Math" panose="02040503050406030204" pitchFamily="18" charset="0"/>
-                      </a:rPr>
-                      <m:t> </m:t>
-                    </m:r>
-                    <m:r>
-                      <a:rPr lang="en-US" altLang="zh-TW" b="0" i="1" dirty="0" smtClean="0">
-                        <a:latin typeface="Cambria Math" panose="02040503050406030204" pitchFamily="18" charset="0"/>
-                      </a:rPr>
-                      <m:t>𝑙𝑖𝑓𝑒</m:t>
-                    </m:r>
-                    <m:r>
-                      <a:rPr lang="en-US" altLang="zh-TW" b="0" i="1" dirty="0" smtClean="0">
-                        <a:latin typeface="Cambria Math" panose="02040503050406030204" pitchFamily="18" charset="0"/>
-                      </a:rPr>
-                      <m:t> </m:t>
-                    </m:r>
-                    <m:r>
-                      <a:rPr lang="en-US" altLang="zh-TW" b="0" i="1" dirty="0" smtClean="0">
-                        <a:latin typeface="Cambria Math" panose="02040503050406030204" pitchFamily="18" charset="0"/>
-                      </a:rPr>
-                      <m:t>𝑡𝑖𝑚𝑒</m:t>
-                    </m:r>
-                    <m:r>
-                      <a:rPr lang="en-US" altLang="zh-TW" b="0" i="1" dirty="0" smtClean="0">
-                        <a:latin typeface="Cambria Math" panose="02040503050406030204" pitchFamily="18" charset="0"/>
-                      </a:rPr>
-                      <m:t>)</m:t>
-                    </m:r>
-                  </m:oMath>
-                </a14:m>
-                <a:endParaRPr lang="en-US" altLang="zh-TW" b="0" dirty="0"/>
-              </a:p>
-              <a:p>
-                <a14:m>
-                  <m:oMath xmlns:m="http://schemas.openxmlformats.org/officeDocument/2006/math">
-                    <m:sSub>
-                      <m:sSubPr>
-                        <m:ctrlPr>
-                          <a:rPr lang="en-US" altLang="zh-TW" i="1">
-                            <a:solidFill>
-                              <a:srgbClr val="FF0000"/>
-                            </a:solidFill>
-                            <a:latin typeface="Cambria Math" panose="02040503050406030204" pitchFamily="18" charset="0"/>
-                          </a:rPr>
-                        </m:ctrlPr>
-                      </m:sSubPr>
-                      <m:e>
-                        <m:r>
-                          <a:rPr lang="en-US" altLang="zh-TW" i="1">
-                            <a:solidFill>
-                              <a:srgbClr val="FF0000"/>
-                            </a:solidFill>
-                            <a:latin typeface="Cambria Math" panose="02040503050406030204" pitchFamily="18" charset="0"/>
-                          </a:rPr>
-                          <m:t>𝜏</m:t>
-                        </m:r>
-                      </m:e>
-                      <m:sub>
-                        <m:r>
-                          <a:rPr lang="en-US" altLang="zh-TW" i="1">
-                            <a:solidFill>
-                              <a:srgbClr val="FF0000"/>
-                            </a:solidFill>
-                            <a:latin typeface="Cambria Math" panose="02040503050406030204" pitchFamily="18" charset="0"/>
-                          </a:rPr>
-                          <m:t>𝑡h𝑒𝑟𝑚𝑎𝑙</m:t>
-                        </m:r>
-                      </m:sub>
-                    </m:sSub>
-                    <m:r>
-                      <a:rPr lang="en-US" altLang="zh-TW" i="1">
-                        <a:solidFill>
-                          <a:srgbClr val="FF0000"/>
-                        </a:solidFill>
-                        <a:latin typeface="Cambria Math" panose="02040503050406030204" pitchFamily="18" charset="0"/>
-                      </a:rPr>
-                      <m:t>=17.5</m:t>
-                    </m:r>
-                    <m:r>
-                      <a:rPr lang="en-US" altLang="zh-TW" i="1">
-                        <a:solidFill>
-                          <a:srgbClr val="FF0000"/>
-                        </a:solidFill>
-                        <a:latin typeface="Cambria Math" panose="02040503050406030204" pitchFamily="18" charset="0"/>
-                      </a:rPr>
-                      <m:t>𝑛𝑠</m:t>
-                    </m:r>
-                  </m:oMath>
-                </a14:m>
-                <a:r>
-                  <a:rPr lang="zh-TW" altLang="en-US" dirty="0">
-                    <a:solidFill>
-                      <a:srgbClr val="FF0000"/>
-                    </a:solidFill>
-                  </a:rPr>
-                  <a:t>     </a:t>
-                </a:r>
-                <a:r>
-                  <a:rPr lang="en-US" altLang="zh-TW" dirty="0"/>
-                  <a:t>(thermal time constant)</a:t>
-                </a:r>
-                <a:endParaRPr lang="en-US" altLang="zh-TW" b="0" dirty="0"/>
-              </a:p>
-              <a:p>
-                <a14:m>
-                  <m:oMath xmlns:m="http://schemas.openxmlformats.org/officeDocument/2006/math">
-                    <m:sSub>
-                      <m:sSubPr>
-                        <m:ctrlPr>
-                          <a:rPr lang="en-US" altLang="zh-TW" i="1">
-                            <a:latin typeface="Cambria Math" panose="02040503050406030204" pitchFamily="18" charset="0"/>
-                          </a:rPr>
-                        </m:ctrlPr>
-                      </m:sSubPr>
-                      <m:e>
-                        <m:r>
-                          <a:rPr lang="en-US" altLang="zh-TW" i="1">
-                            <a:latin typeface="Cambria Math" panose="02040503050406030204" pitchFamily="18" charset="0"/>
-                          </a:rPr>
-                          <m:t>𝜎</m:t>
-                        </m:r>
-                      </m:e>
-                      <m:sub>
-                        <m:r>
-                          <a:rPr lang="en-US" altLang="zh-TW" i="1">
-                            <a:latin typeface="Cambria Math" panose="02040503050406030204" pitchFamily="18" charset="0"/>
-                          </a:rPr>
-                          <m:t>𝐹𝐶𝐴</m:t>
-                        </m:r>
-                      </m:sub>
-                    </m:sSub>
-                    <m:r>
-                      <a:rPr lang="en-US" altLang="zh-TW" i="1">
-                        <a:latin typeface="Cambria Math" panose="02040503050406030204" pitchFamily="18" charset="0"/>
-                      </a:rPr>
-                      <m:t>=1.04</m:t>
-                    </m:r>
-                    <m:r>
-                      <a:rPr lang="en-US" altLang="zh-TW" i="1">
-                        <a:latin typeface="Cambria Math" panose="02040503050406030204" pitchFamily="18" charset="0"/>
-                      </a:rPr>
-                      <m:t>𝑒</m:t>
-                    </m:r>
-                    <m:r>
-                      <a:rPr lang="en-US" altLang="zh-TW" i="1">
-                        <a:latin typeface="Cambria Math" panose="02040503050406030204" pitchFamily="18" charset="0"/>
-                      </a:rPr>
-                      <m:t>−17 </m:t>
-                    </m:r>
-                    <m:r>
-                      <a:rPr lang="en-US" altLang="zh-TW" i="1">
-                        <a:latin typeface="Cambria Math" panose="02040503050406030204" pitchFamily="18" charset="0"/>
-                      </a:rPr>
-                      <m:t>𝑐</m:t>
-                    </m:r>
-                    <m:sSup>
-                      <m:sSupPr>
-                        <m:ctrlPr>
-                          <a:rPr lang="en-US" altLang="zh-TW" i="1">
-                            <a:latin typeface="Cambria Math" panose="02040503050406030204" pitchFamily="18" charset="0"/>
-                          </a:rPr>
-                        </m:ctrlPr>
-                      </m:sSupPr>
-                      <m:e>
-                        <m:r>
-                          <a:rPr lang="en-US" altLang="zh-TW" i="1">
-                            <a:latin typeface="Cambria Math" panose="02040503050406030204" pitchFamily="18" charset="0"/>
-                          </a:rPr>
-                          <m:t>𝑚</m:t>
-                        </m:r>
-                      </m:e>
-                      <m:sup>
-                        <m:r>
-                          <a:rPr lang="en-US" altLang="zh-TW" i="1">
-                            <a:latin typeface="Cambria Math" panose="02040503050406030204" pitchFamily="18" charset="0"/>
-                          </a:rPr>
-                          <m:t>2</m:t>
-                        </m:r>
-                      </m:sup>
-                    </m:sSup>
-                  </m:oMath>
-                </a14:m>
-                <a:r>
-                  <a:rPr lang="zh-TW" altLang="en-US" dirty="0"/>
-                  <a:t>  </a:t>
-                </a:r>
-                <a:endParaRPr lang="en-US" altLang="zh-TW" dirty="0"/>
-              </a:p>
-              <a:p>
-                <a14:m>
-                  <m:oMath xmlns:m="http://schemas.openxmlformats.org/officeDocument/2006/math">
-                    <m:sSub>
-                      <m:sSubPr>
-                        <m:ctrlPr>
-                          <a:rPr lang="en-US" altLang="zh-TW" b="0" i="1" smtClean="0">
-                            <a:latin typeface="Cambria Math" panose="02040503050406030204" pitchFamily="18" charset="0"/>
-                          </a:rPr>
-                        </m:ctrlPr>
-                      </m:sSubPr>
-                      <m:e>
-                        <m:r>
-                          <a:rPr lang="en-US" altLang="zh-TW" b="0" i="1" smtClean="0">
-                            <a:latin typeface="Cambria Math" panose="02040503050406030204" pitchFamily="18" charset="0"/>
-                          </a:rPr>
-                          <m:t>𝛽</m:t>
-                        </m:r>
-                      </m:e>
-                      <m:sub>
-                        <m:r>
-                          <a:rPr lang="en-US" altLang="zh-TW" b="0" i="1" smtClean="0">
-                            <a:latin typeface="Cambria Math" panose="02040503050406030204" pitchFamily="18" charset="0"/>
-                          </a:rPr>
-                          <m:t>𝑇𝑃𝐴</m:t>
-                        </m:r>
-                      </m:sub>
-                    </m:sSub>
-                    <m:r>
-                      <a:rPr lang="en-US" altLang="zh-TW" b="0" i="1" smtClean="0">
-                        <a:latin typeface="Cambria Math" panose="02040503050406030204" pitchFamily="18" charset="0"/>
-                      </a:rPr>
-                      <m:t>=</m:t>
-                    </m:r>
-                  </m:oMath>
-                </a14:m>
-                <a:r>
-                  <a:rPr lang="en-US" altLang="zh-TW" dirty="0"/>
-                  <a:t> 5e-13 cm/</a:t>
-                </a:r>
-                <a:r>
-                  <a:rPr lang="en-US" altLang="zh-TW" dirty="0" err="1"/>
-                  <a:t>mW</a:t>
-                </a:r>
-                <a:endParaRPr lang="en-US" altLang="zh-TW" dirty="0"/>
-              </a:p>
-              <a:p>
-                <a:r>
-                  <a:rPr lang="en-US" altLang="zh-TW" dirty="0"/>
-                  <a:t>n2 = 4.5e-9 um^2/</a:t>
-                </a:r>
-                <a:r>
-                  <a:rPr lang="en-US" altLang="zh-TW" dirty="0" err="1"/>
-                  <a:t>mW</a:t>
-                </a:r>
-                <a:endParaRPr lang="en-US" altLang="zh-TW" dirty="0"/>
-              </a:p>
-              <a:p>
-                <a:r>
-                  <a:rPr lang="en-US" altLang="zh-TW" dirty="0" err="1"/>
-                  <a:t>dn</a:t>
-                </a:r>
-                <a:r>
-                  <a:rPr lang="en-US" altLang="zh-TW" dirty="0"/>
-                  <a:t>/dT =1.95e-4 1/K (</a:t>
-                </a:r>
-                <a:r>
-                  <a:rPr lang="zh-TW" altLang="en-US" dirty="0"/>
-                  <a:t>折射率溫度斜率，參考</a:t>
-                </a:r>
-                <a:r>
-                  <a:rPr lang="en-US" altLang="zh-TW" dirty="0" err="1"/>
-                  <a:t>imec</a:t>
-                </a:r>
-                <a:r>
-                  <a:rPr lang="en-US" altLang="zh-TW" dirty="0"/>
-                  <a:t> paper</a:t>
-                </a:r>
-                <a:r>
-                  <a:rPr lang="zh-TW" altLang="en-US" dirty="0"/>
-                  <a:t>數值</a:t>
-                </a:r>
-                <a:r>
-                  <a:rPr lang="en-US" altLang="zh-TW" dirty="0"/>
-                  <a:t>)</a:t>
-                </a:r>
-              </a:p>
-              <a:p>
-                <a:r>
-                  <a:rPr lang="en-US" altLang="zh-TW" dirty="0"/>
-                  <a:t>Si </a:t>
-                </a:r>
-                <a:r>
-                  <a:rPr lang="zh-TW" altLang="en-US" dirty="0"/>
-                  <a:t>密度：</a:t>
-                </a:r>
-                <a:r>
-                  <a:rPr lang="en-US" altLang="zh-TW" dirty="0"/>
-                  <a:t>2.329e-12 g/um^3, </a:t>
-                </a:r>
-                <a:r>
-                  <a:rPr lang="zh-TW" altLang="en-US" dirty="0"/>
-                  <a:t>比熱：</a:t>
-                </a:r>
-                <a:r>
-                  <a:rPr lang="en-US" altLang="zh-TW" dirty="0"/>
-                  <a:t>0.713 J/g/K</a:t>
-                </a:r>
-              </a:p>
-              <a:p>
-                <a:r>
-                  <a:rPr lang="en-US" altLang="zh-TW" dirty="0"/>
-                  <a:t>mode area = 0.22*0.5 =0.11 um^2</a:t>
-                </a:r>
-              </a:p>
-              <a:p>
-                <a:r>
-                  <a:rPr lang="en-US" altLang="zh-TW" dirty="0"/>
-                  <a:t>TPA loss = 0.0415 1/cm</a:t>
-                </a:r>
-              </a:p>
-              <a:p>
-                <a:r>
-                  <a:rPr lang="en-US" altLang="zh-TW" dirty="0" err="1"/>
-                  <a:t>FCA</a:t>
-                </a:r>
-                <a:r>
-                  <a:rPr lang="en-US" altLang="zh-TW" dirty="0"/>
-                  <a:t> loss =  0.07027 1/cm</a:t>
-                </a:r>
-              </a:p>
-            </p:txBody>
-          </p:sp>
-        </mc:Choice>
-        <mc:Fallback xmlns="">
-          <p:sp>
-            <p:nvSpPr>
-              <p:cNvPr id="4" name="內容版面配置區 3">
-                <a:extLst>
-                  <a:ext uri="{FF2B5EF4-FFF2-40B4-BE49-F238E27FC236}">
-                    <a16:creationId xmlns:a16="http://schemas.microsoft.com/office/drawing/2014/main" id="{1BF1B269-115C-83CE-4E15-5B99EB0D045A}"/>
-                  </a:ext>
-                </a:extLst>
-              </p:cNvPr>
-              <p:cNvSpPr txBox="1">
-                <a:spLocks noGrp="1" noRot="1" noChangeAspect="1" noMove="1" noResize="1" noEditPoints="1" noAdjustHandles="1" noChangeArrowheads="1" noChangeShapeType="1" noTextEdit="1"/>
-              </p:cNvSpPr>
-              <p:nvPr>
-                <p:ph idx="1"/>
-              </p:nvPr>
-            </p:nvSpPr>
-            <p:spPr>
-              <a:xfrm>
-                <a:off x="609600" y="1337361"/>
-                <a:ext cx="10429875" cy="5155514"/>
-              </a:xfrm>
-              <a:prstGeom prst="rect">
-                <a:avLst/>
-              </a:prstGeom>
-              <a:blipFill>
-                <a:blip r:embed="rId2"/>
-                <a:stretch>
-                  <a:fillRect l="-1052" t="-1891" b="-2364"/>
-                </a:stretch>
-              </a:blipFill>
-            </p:spPr>
-            <p:txBody>
-              <a:bodyPr/>
-              <a:lstStyle/>
-              <a:p>
-                <a:r>
-                  <a:rPr lang="zh-TW" altLang="en-US">
-                    <a:noFill/>
-                  </a:rPr>
-                  <a:t> </a:t>
-                </a:r>
-              </a:p>
-            </p:txBody>
-          </p:sp>
-        </mc:Fallback>
-      </mc:AlternateContent>
-      <p:sp>
-        <p:nvSpPr>
-          <p:cNvPr id="3" name="文字方塊 2">
-            <a:extLst>
-              <a:ext uri="{FF2B5EF4-FFF2-40B4-BE49-F238E27FC236}">
-                <a16:creationId xmlns:a16="http://schemas.microsoft.com/office/drawing/2014/main" id="{94ED8C82-972D-4905-F01C-C05DF43CCFB6}"/>
-              </a:ext>
-            </a:extLst>
-          </p:cNvPr>
-          <p:cNvSpPr txBox="1"/>
-          <p:nvPr/>
-        </p:nvSpPr>
-        <p:spPr>
-          <a:xfrm>
-            <a:off x="609600" y="676766"/>
-            <a:ext cx="11306175" cy="461665"/>
-          </a:xfrm>
-          <a:prstGeom prst="rect">
-            <a:avLst/>
-          </a:prstGeom>
-          <a:noFill/>
-        </p:spPr>
-        <p:txBody>
-          <a:bodyPr wrap="square" rtlCol="0">
-            <a:spAutoFit/>
-          </a:bodyPr>
-          <a:lstStyle/>
-          <a:p>
-            <a:r>
-              <a:rPr lang="zh-TW" altLang="en-US" sz="2400" dirty="0"/>
-              <a:t>主要調整</a:t>
-            </a:r>
-            <a:r>
-              <a:rPr lang="en-US" altLang="zh-TW" sz="2400" dirty="0"/>
-              <a:t>free carrier life time (deep </a:t>
-            </a:r>
-            <a:r>
-              <a:rPr lang="zh-TW" altLang="en-US" sz="2400" dirty="0"/>
-              <a:t>深度</a:t>
-            </a:r>
-            <a:r>
-              <a:rPr lang="en-US" altLang="zh-TW" sz="2400" dirty="0"/>
-              <a:t>)</a:t>
-            </a:r>
-            <a:r>
-              <a:rPr lang="zh-TW" altLang="en-US" sz="2400" dirty="0"/>
-              <a:t>以及</a:t>
-            </a:r>
-            <a:r>
-              <a:rPr lang="en-US" altLang="zh-TW" sz="2400" dirty="0"/>
-              <a:t>thermal time constant (</a:t>
-            </a:r>
-            <a:r>
-              <a:rPr lang="zh-TW" altLang="en-US" sz="2400" dirty="0"/>
-              <a:t>共振波長位置</a:t>
-            </a:r>
-            <a:r>
-              <a:rPr lang="en-US" altLang="zh-TW" sz="2400" dirty="0"/>
-              <a:t>)</a:t>
-            </a:r>
-            <a:endParaRPr lang="zh-TW" altLang="en-US" sz="2400" dirty="0"/>
-          </a:p>
-        </p:txBody>
-      </p:sp>
-    </p:spTree>
-    <p:extLst>
-      <p:ext uri="{BB962C8B-B14F-4D97-AF65-F5344CB8AC3E}">
-        <p14:creationId xmlns:p14="http://schemas.microsoft.com/office/powerpoint/2010/main" val="4236525232"/>
       </p:ext>
     </p:extLst>
   </p:cSld>

--- a/test_fit/parameter_dependency.pptx
+++ b/test_fit/parameter_dependency.pptx
@@ -10,6 +10,7 @@
     <p:sldId id="279" r:id="rId4"/>
     <p:sldId id="280" r:id="rId5"/>
     <p:sldId id="281" r:id="rId6"/>
+    <p:sldId id="282" r:id="rId7"/>
   </p:sldIdLst>
   <p:sldSz cx="12192000" cy="6858000"/>
   <p:notesSz cx="6858000" cy="9144000"/>
@@ -263,7 +264,7 @@
           <a:p>
             <a:fld id="{8DDDD884-4005-48B0-BA66-9591723C410A}" type="datetimeFigureOut">
               <a:rPr lang="zh-TW" altLang="en-US" smtClean="0"/>
-              <a:t>2025/7/11</a:t>
+              <a:t>2025/7/14</a:t>
             </a:fld>
             <a:endParaRPr lang="zh-TW" altLang="en-US"/>
           </a:p>
@@ -461,7 +462,7 @@
           <a:p>
             <a:fld id="{8DDDD884-4005-48B0-BA66-9591723C410A}" type="datetimeFigureOut">
               <a:rPr lang="zh-TW" altLang="en-US" smtClean="0"/>
-              <a:t>2025/7/11</a:t>
+              <a:t>2025/7/14</a:t>
             </a:fld>
             <a:endParaRPr lang="zh-TW" altLang="en-US"/>
           </a:p>
@@ -669,7 +670,7 @@
           <a:p>
             <a:fld id="{8DDDD884-4005-48B0-BA66-9591723C410A}" type="datetimeFigureOut">
               <a:rPr lang="zh-TW" altLang="en-US" smtClean="0"/>
-              <a:t>2025/7/11</a:t>
+              <a:t>2025/7/14</a:t>
             </a:fld>
             <a:endParaRPr lang="zh-TW" altLang="en-US"/>
           </a:p>
@@ -867,7 +868,7 @@
           <a:p>
             <a:fld id="{8DDDD884-4005-48B0-BA66-9591723C410A}" type="datetimeFigureOut">
               <a:rPr lang="zh-TW" altLang="en-US" smtClean="0"/>
-              <a:t>2025/7/11</a:t>
+              <a:t>2025/7/14</a:t>
             </a:fld>
             <a:endParaRPr lang="zh-TW" altLang="en-US"/>
           </a:p>
@@ -1142,7 +1143,7 @@
           <a:p>
             <a:fld id="{8DDDD884-4005-48B0-BA66-9591723C410A}" type="datetimeFigureOut">
               <a:rPr lang="zh-TW" altLang="en-US" smtClean="0"/>
-              <a:t>2025/7/11</a:t>
+              <a:t>2025/7/14</a:t>
             </a:fld>
             <a:endParaRPr lang="zh-TW" altLang="en-US"/>
           </a:p>
@@ -1407,7 +1408,7 @@
           <a:p>
             <a:fld id="{8DDDD884-4005-48B0-BA66-9591723C410A}" type="datetimeFigureOut">
               <a:rPr lang="zh-TW" altLang="en-US" smtClean="0"/>
-              <a:t>2025/7/11</a:t>
+              <a:t>2025/7/14</a:t>
             </a:fld>
             <a:endParaRPr lang="zh-TW" altLang="en-US"/>
           </a:p>
@@ -1819,7 +1820,7 @@
           <a:p>
             <a:fld id="{8DDDD884-4005-48B0-BA66-9591723C410A}" type="datetimeFigureOut">
               <a:rPr lang="zh-TW" altLang="en-US" smtClean="0"/>
-              <a:t>2025/7/11</a:t>
+              <a:t>2025/7/14</a:t>
             </a:fld>
             <a:endParaRPr lang="zh-TW" altLang="en-US"/>
           </a:p>
@@ -1960,7 +1961,7 @@
           <a:p>
             <a:fld id="{8DDDD884-4005-48B0-BA66-9591723C410A}" type="datetimeFigureOut">
               <a:rPr lang="zh-TW" altLang="en-US" smtClean="0"/>
-              <a:t>2025/7/11</a:t>
+              <a:t>2025/7/14</a:t>
             </a:fld>
             <a:endParaRPr lang="zh-TW" altLang="en-US"/>
           </a:p>
@@ -2073,7 +2074,7 @@
           <a:p>
             <a:fld id="{8DDDD884-4005-48B0-BA66-9591723C410A}" type="datetimeFigureOut">
               <a:rPr lang="zh-TW" altLang="en-US" smtClean="0"/>
-              <a:t>2025/7/11</a:t>
+              <a:t>2025/7/14</a:t>
             </a:fld>
             <a:endParaRPr lang="zh-TW" altLang="en-US"/>
           </a:p>
@@ -2384,7 +2385,7 @@
           <a:p>
             <a:fld id="{8DDDD884-4005-48B0-BA66-9591723C410A}" type="datetimeFigureOut">
               <a:rPr lang="zh-TW" altLang="en-US" smtClean="0"/>
-              <a:t>2025/7/11</a:t>
+              <a:t>2025/7/14</a:t>
             </a:fld>
             <a:endParaRPr lang="zh-TW" altLang="en-US"/>
           </a:p>
@@ -2672,7 +2673,7 @@
           <a:p>
             <a:fld id="{8DDDD884-4005-48B0-BA66-9591723C410A}" type="datetimeFigureOut">
               <a:rPr lang="zh-TW" altLang="en-US" smtClean="0"/>
-              <a:t>2025/7/11</a:t>
+              <a:t>2025/7/14</a:t>
             </a:fld>
             <a:endParaRPr lang="zh-TW" altLang="en-US"/>
           </a:p>
@@ -2913,7 +2914,7 @@
           <a:p>
             <a:fld id="{8DDDD884-4005-48B0-BA66-9591723C410A}" type="datetimeFigureOut">
               <a:rPr lang="zh-TW" altLang="en-US" smtClean="0"/>
-              <a:t>2025/7/11</a:t>
+              <a:t>2025/7/14</a:t>
             </a:fld>
             <a:endParaRPr lang="zh-TW" altLang="en-US"/>
           </a:p>
@@ -3348,10 +3349,16 @@
         </p:nvSpPr>
         <p:spPr/>
         <p:txBody>
-          <a:bodyPr/>
+          <a:bodyPr>
+            <a:normAutofit fontScale="90000"/>
+          </a:bodyPr>
           <a:lstStyle/>
           <a:p>
-            <a:endParaRPr lang="zh-TW" altLang="en-US"/>
+            <a:r>
+              <a:rPr lang="en-US" altLang="zh-TW" dirty="0"/>
+              <a:t>Parameter dependency check of couple mode theory in time </a:t>
+            </a:r>
+            <a:endParaRPr lang="zh-TW" altLang="en-US" dirty="0"/>
           </a:p>
         </p:txBody>
       </p:sp>
@@ -3444,8 +3451,8 @@
           </a:p>
         </p:txBody>
       </p:sp>
-      <mc:AlternateContent xmlns:mc="http://schemas.openxmlformats.org/markup-compatibility/2006">
-        <mc:Choice xmlns:a14="http://schemas.microsoft.com/office/drawing/2010/main" Requires="a14">
+      <mc:AlternateContent xmlns:mc="http://schemas.openxmlformats.org/markup-compatibility/2006" xmlns:a14="http://schemas.microsoft.com/office/drawing/2010/main">
+        <mc:Choice Requires="a14">
           <p:sp>
             <p:nvSpPr>
               <p:cNvPr id="4" name="內容版面配置區 3">
@@ -4075,19 +4082,7 @@
                                 <a:rPr lang="en-US" altLang="zh-TW" sz="2000" i="1">
                                   <a:latin typeface="Cambria Math" panose="02040503050406030204" pitchFamily="18" charset="0"/>
                                 </a:rPr>
-                                <m:t>/</m:t>
-                              </m:r>
-                              <m:r>
-                                <a:rPr lang="en-US" altLang="zh-TW" sz="2000" i="1">
-                                  <a:latin typeface="Cambria Math" panose="02040503050406030204" pitchFamily="18" charset="0"/>
-                                </a:rPr>
-                                <m:t>2</m:t>
-                              </m:r>
-                              <m:r>
-                                <a:rPr lang="en-US" altLang="zh-TW" sz="2000" i="1">
-                                  <a:latin typeface="Cambria Math" panose="02040503050406030204" pitchFamily="18" charset="0"/>
-                                </a:rPr>
-                                <m:t>+</m:t>
+                                <m:t>/2+</m:t>
                               </m:r>
                               <m:f>
                                 <m:fPr>
@@ -4394,7 +4389,7 @@
             </p:txBody>
           </p:sp>
         </mc:Choice>
-        <mc:Fallback>
+        <mc:Fallback xmlns="">
           <p:sp>
             <p:nvSpPr>
               <p:cNvPr id="4" name="內容版面配置區 3">
@@ -6968,8 +6963,8 @@
           <a:chExt cx="0" cy="0"/>
         </a:xfrm>
       </p:grpSpPr>
-      <mc:AlternateContent xmlns:mc="http://schemas.openxmlformats.org/markup-compatibility/2006">
-        <mc:Choice xmlns:a14="http://schemas.microsoft.com/office/drawing/2010/main" Requires="a14">
+      <mc:AlternateContent xmlns:mc="http://schemas.openxmlformats.org/markup-compatibility/2006" xmlns:a14="http://schemas.microsoft.com/office/drawing/2010/main">
+        <mc:Choice Requires="a14">
           <p:sp>
             <p:nvSpPr>
               <p:cNvPr id="5" name="文字方塊 4">
@@ -7443,7 +7438,7 @@
             </p:txBody>
           </p:sp>
         </mc:Choice>
-        <mc:Fallback>
+        <mc:Fallback xmlns="">
           <p:sp>
             <p:nvSpPr>
               <p:cNvPr id="5" name="文字方塊 4">
@@ -7492,6 +7487,96 @@
     <p:extLst>
       <p:ext uri="{BB962C8B-B14F-4D97-AF65-F5344CB8AC3E}">
         <p14:creationId xmlns:p14="http://schemas.microsoft.com/office/powerpoint/2010/main" val="1147414919"/>
+      </p:ext>
+    </p:extLst>
+  </p:cSld>
+  <p:clrMapOvr>
+    <a:masterClrMapping/>
+  </p:clrMapOvr>
+</p:sld>
+</file>
+
+<file path=ppt/slides/slide6.xml><?xml version="1.0" encoding="utf-8"?>
+<p:sld xmlns:a="http://schemas.openxmlformats.org/drawingml/2006/main" xmlns:r="http://schemas.openxmlformats.org/officeDocument/2006/relationships" xmlns:p="http://schemas.openxmlformats.org/presentationml/2006/main">
+  <p:cSld>
+    <p:spTree>
+      <p:nvGrpSpPr>
+        <p:cNvPr id="1" name=""/>
+        <p:cNvGrpSpPr/>
+        <p:nvPr/>
+      </p:nvGrpSpPr>
+      <p:grpSpPr>
+        <a:xfrm>
+          <a:off x="0" y="0"/>
+          <a:ext cx="0" cy="0"/>
+          <a:chOff x="0" y="0"/>
+          <a:chExt cx="0" cy="0"/>
+        </a:xfrm>
+      </p:grpSpPr>
+      <p:pic>
+        <p:nvPicPr>
+          <p:cNvPr id="9" name="圖片 8">
+            <a:extLst>
+              <a:ext uri="{FF2B5EF4-FFF2-40B4-BE49-F238E27FC236}">
+                <a16:creationId xmlns:a16="http://schemas.microsoft.com/office/drawing/2014/main" id="{B22BD464-E30B-DE93-491F-F33A0C934F73}"/>
+              </a:ext>
+            </a:extLst>
+          </p:cNvPr>
+          <p:cNvPicPr>
+            <a:picLocks noChangeAspect="1"/>
+          </p:cNvPicPr>
+          <p:nvPr/>
+        </p:nvPicPr>
+        <p:blipFill>
+          <a:blip r:embed="rId2"/>
+          <a:stretch>
+            <a:fillRect/>
+          </a:stretch>
+        </p:blipFill>
+        <p:spPr>
+          <a:xfrm>
+            <a:off x="1" y="1365583"/>
+            <a:ext cx="6096000" cy="4606963"/>
+          </a:xfrm>
+          <a:prstGeom prst="rect">
+            <a:avLst/>
+          </a:prstGeom>
+        </p:spPr>
+      </p:pic>
+      <p:pic>
+        <p:nvPicPr>
+          <p:cNvPr id="11" name="圖片 10">
+            <a:extLst>
+              <a:ext uri="{FF2B5EF4-FFF2-40B4-BE49-F238E27FC236}">
+                <a16:creationId xmlns:a16="http://schemas.microsoft.com/office/drawing/2014/main" id="{CEA6D755-D65D-1C99-B5F6-29C8993A94E5}"/>
+              </a:ext>
+            </a:extLst>
+          </p:cNvPr>
+          <p:cNvPicPr>
+            <a:picLocks noChangeAspect="1"/>
+          </p:cNvPicPr>
+          <p:nvPr/>
+        </p:nvPicPr>
+        <p:blipFill>
+          <a:blip r:embed="rId3"/>
+          <a:stretch>
+            <a:fillRect/>
+          </a:stretch>
+        </p:blipFill>
+        <p:spPr>
+          <a:xfrm>
+            <a:off x="5895975" y="1142812"/>
+            <a:ext cx="6202279" cy="4724750"/>
+          </a:xfrm>
+          <a:prstGeom prst="rect">
+            <a:avLst/>
+          </a:prstGeom>
+        </p:spPr>
+      </p:pic>
+    </p:spTree>
+    <p:extLst>
+      <p:ext uri="{BB962C8B-B14F-4D97-AF65-F5344CB8AC3E}">
+        <p14:creationId xmlns:p14="http://schemas.microsoft.com/office/powerpoint/2010/main" val="3230402140"/>
       </p:ext>
     </p:extLst>
   </p:cSld>

--- a/test_fit/parameter_dependency.pptx
+++ b/test_fit/parameter_dependency.pptx
@@ -11,6 +11,7 @@
     <p:sldId id="280" r:id="rId5"/>
     <p:sldId id="281" r:id="rId6"/>
     <p:sldId id="282" r:id="rId7"/>
+    <p:sldId id="283" r:id="rId8"/>
   </p:sldIdLst>
   <p:sldSz cx="12192000" cy="6858000"/>
   <p:notesSz cx="6858000" cy="9144000"/>
@@ -264,7 +265,7 @@
           <a:p>
             <a:fld id="{8DDDD884-4005-48B0-BA66-9591723C410A}" type="datetimeFigureOut">
               <a:rPr lang="zh-TW" altLang="en-US" smtClean="0"/>
-              <a:t>2025/7/14</a:t>
+              <a:t>2025/7/15</a:t>
             </a:fld>
             <a:endParaRPr lang="zh-TW" altLang="en-US"/>
           </a:p>
@@ -462,7 +463,7 @@
           <a:p>
             <a:fld id="{8DDDD884-4005-48B0-BA66-9591723C410A}" type="datetimeFigureOut">
               <a:rPr lang="zh-TW" altLang="en-US" smtClean="0"/>
-              <a:t>2025/7/14</a:t>
+              <a:t>2025/7/15</a:t>
             </a:fld>
             <a:endParaRPr lang="zh-TW" altLang="en-US"/>
           </a:p>
@@ -670,7 +671,7 @@
           <a:p>
             <a:fld id="{8DDDD884-4005-48B0-BA66-9591723C410A}" type="datetimeFigureOut">
               <a:rPr lang="zh-TW" altLang="en-US" smtClean="0"/>
-              <a:t>2025/7/14</a:t>
+              <a:t>2025/7/15</a:t>
             </a:fld>
             <a:endParaRPr lang="zh-TW" altLang="en-US"/>
           </a:p>
@@ -868,7 +869,7 @@
           <a:p>
             <a:fld id="{8DDDD884-4005-48B0-BA66-9591723C410A}" type="datetimeFigureOut">
               <a:rPr lang="zh-TW" altLang="en-US" smtClean="0"/>
-              <a:t>2025/7/14</a:t>
+              <a:t>2025/7/15</a:t>
             </a:fld>
             <a:endParaRPr lang="zh-TW" altLang="en-US"/>
           </a:p>
@@ -1143,7 +1144,7 @@
           <a:p>
             <a:fld id="{8DDDD884-4005-48B0-BA66-9591723C410A}" type="datetimeFigureOut">
               <a:rPr lang="zh-TW" altLang="en-US" smtClean="0"/>
-              <a:t>2025/7/14</a:t>
+              <a:t>2025/7/15</a:t>
             </a:fld>
             <a:endParaRPr lang="zh-TW" altLang="en-US"/>
           </a:p>
@@ -1408,7 +1409,7 @@
           <a:p>
             <a:fld id="{8DDDD884-4005-48B0-BA66-9591723C410A}" type="datetimeFigureOut">
               <a:rPr lang="zh-TW" altLang="en-US" smtClean="0"/>
-              <a:t>2025/7/14</a:t>
+              <a:t>2025/7/15</a:t>
             </a:fld>
             <a:endParaRPr lang="zh-TW" altLang="en-US"/>
           </a:p>
@@ -1820,7 +1821,7 @@
           <a:p>
             <a:fld id="{8DDDD884-4005-48B0-BA66-9591723C410A}" type="datetimeFigureOut">
               <a:rPr lang="zh-TW" altLang="en-US" smtClean="0"/>
-              <a:t>2025/7/14</a:t>
+              <a:t>2025/7/15</a:t>
             </a:fld>
             <a:endParaRPr lang="zh-TW" altLang="en-US"/>
           </a:p>
@@ -1961,7 +1962,7 @@
           <a:p>
             <a:fld id="{8DDDD884-4005-48B0-BA66-9591723C410A}" type="datetimeFigureOut">
               <a:rPr lang="zh-TW" altLang="en-US" smtClean="0"/>
-              <a:t>2025/7/14</a:t>
+              <a:t>2025/7/15</a:t>
             </a:fld>
             <a:endParaRPr lang="zh-TW" altLang="en-US"/>
           </a:p>
@@ -2074,7 +2075,7 @@
           <a:p>
             <a:fld id="{8DDDD884-4005-48B0-BA66-9591723C410A}" type="datetimeFigureOut">
               <a:rPr lang="zh-TW" altLang="en-US" smtClean="0"/>
-              <a:t>2025/7/14</a:t>
+              <a:t>2025/7/15</a:t>
             </a:fld>
             <a:endParaRPr lang="zh-TW" altLang="en-US"/>
           </a:p>
@@ -2385,7 +2386,7 @@
           <a:p>
             <a:fld id="{8DDDD884-4005-48B0-BA66-9591723C410A}" type="datetimeFigureOut">
               <a:rPr lang="zh-TW" altLang="en-US" smtClean="0"/>
-              <a:t>2025/7/14</a:t>
+              <a:t>2025/7/15</a:t>
             </a:fld>
             <a:endParaRPr lang="zh-TW" altLang="en-US"/>
           </a:p>
@@ -2673,7 +2674,7 @@
           <a:p>
             <a:fld id="{8DDDD884-4005-48B0-BA66-9591723C410A}" type="datetimeFigureOut">
               <a:rPr lang="zh-TW" altLang="en-US" smtClean="0"/>
-              <a:t>2025/7/14</a:t>
+              <a:t>2025/7/15</a:t>
             </a:fld>
             <a:endParaRPr lang="zh-TW" altLang="en-US"/>
           </a:p>
@@ -2914,7 +2915,7 @@
           <a:p>
             <a:fld id="{8DDDD884-4005-48B0-BA66-9591723C410A}" type="datetimeFigureOut">
               <a:rPr lang="zh-TW" altLang="en-US" smtClean="0"/>
-              <a:t>2025/7/14</a:t>
+              <a:t>2025/7/15</a:t>
             </a:fld>
             <a:endParaRPr lang="zh-TW" altLang="en-US"/>
           </a:p>
@@ -3383,7 +3384,15 @@
           <a:bodyPr/>
           <a:lstStyle/>
           <a:p>
-            <a:endParaRPr lang="zh-TW" altLang="en-US"/>
+            <a:r>
+              <a:rPr lang="zh-TW" altLang="en-US" dirty="0"/>
+              <a:t>陳居文 </a:t>
+            </a:r>
+            <a:r>
+              <a:rPr lang="en-US" altLang="zh-TW" dirty="0"/>
+              <a:t>2025.07.15</a:t>
+            </a:r>
+            <a:endParaRPr lang="zh-TW" altLang="en-US" dirty="0"/>
           </a:p>
         </p:txBody>
       </p:sp>
@@ -4785,8 +4794,8 @@
           </p:sp>
         </mc:Fallback>
       </mc:AlternateContent>
-      <mc:AlternateContent xmlns:mc="http://schemas.openxmlformats.org/markup-compatibility/2006" xmlns:a14="http://schemas.microsoft.com/office/drawing/2010/main">
-        <mc:Choice Requires="a14">
+      <mc:AlternateContent xmlns:mc="http://schemas.openxmlformats.org/markup-compatibility/2006">
+        <mc:Choice xmlns:a14="http://schemas.microsoft.com/office/drawing/2010/main" Requires="a14">
           <p:sp>
             <p:nvSpPr>
               <p:cNvPr id="10" name="文字方塊 9">
@@ -4967,6 +4976,12 @@
                               </m:r>
                             </m:sub>
                           </m:sSub>
+                          <m:r>
+                            <a:rPr lang="en-US" altLang="zh-TW" sz="2000" b="0" i="1" smtClean="0">
+                              <a:latin typeface="Cambria Math" panose="02040503050406030204" pitchFamily="18" charset="0"/>
+                            </a:rPr>
+                            <m:t>𝐿</m:t>
+                          </m:r>
                           <m:sSub>
                             <m:sSubPr>
                               <m:ctrlPr>
@@ -4980,7 +4995,7 @@
                                 <a:rPr lang="en-US" altLang="zh-TW" sz="2000" b="0" i="1" smtClean="0">
                                   <a:latin typeface="Cambria Math" panose="02040503050406030204" pitchFamily="18" charset="0"/>
                                 </a:rPr>
-                                <m:t>𝑉</m:t>
+                                <m:t>𝐴</m:t>
                               </m:r>
                             </m:e>
                             <m:sub>
@@ -5329,7 +5344,7 @@
             </p:txBody>
           </p:sp>
         </mc:Choice>
-        <mc:Fallback xmlns="">
+        <mc:Fallback>
           <p:sp>
             <p:nvSpPr>
               <p:cNvPr id="10" name="文字方塊 9">
@@ -5439,8 +5454,8 @@
           </a:p>
         </p:txBody>
       </p:sp>
-      <mc:AlternateContent xmlns:mc="http://schemas.openxmlformats.org/markup-compatibility/2006" xmlns:a14="http://schemas.microsoft.com/office/drawing/2010/main">
-        <mc:Choice Requires="a14">
+      <mc:AlternateContent xmlns:mc="http://schemas.openxmlformats.org/markup-compatibility/2006">
+        <mc:Choice xmlns:a14="http://schemas.microsoft.com/office/drawing/2010/main" Requires="a14">
           <p:sp>
             <p:nvSpPr>
               <p:cNvPr id="3" name="內容版面配置區 2">
@@ -5908,22 +5923,16 @@
                         </m:dPr>
                         <m:e>
                           <m:r>
-                            <a:rPr lang="en-US" altLang="zh-TW" sz="2000" b="0" i="1" smtClean="0">
+                            <a:rPr lang="en-US" altLang="zh-TW" sz="2000" i="1">
                               <a:latin typeface="Cambria Math" panose="02040503050406030204" pitchFamily="18" charset="0"/>
                             </a:rPr>
-                            <m:t>75.252</m:t>
+                            <m:t>0.007525259442194646</m:t>
                           </m:r>
                           <m:r>
                             <a:rPr lang="en-US" altLang="zh-TW" sz="2000" b="0" i="1" smtClean="0">
                               <a:latin typeface="Cambria Math" panose="02040503050406030204" pitchFamily="18" charset="0"/>
                             </a:rPr>
-                            <m:t>𝑒</m:t>
-                          </m:r>
-                          <m:r>
-                            <a:rPr lang="en-US" altLang="zh-TW" sz="2000" b="0" i="1" smtClean="0">
-                              <a:latin typeface="Cambria Math" panose="02040503050406030204" pitchFamily="18" charset="0"/>
-                            </a:rPr>
-                            <m:t>12</m:t>
+                            <m:t> </m:t>
                           </m:r>
                           <m:f>
                             <m:fPr>
@@ -5938,10 +5947,22 @@
                                 <a:rPr lang="en-US" altLang="zh-TW" sz="2000" b="0" i="1" smtClean="0">
                                   <a:latin typeface="Cambria Math" panose="02040503050406030204" pitchFamily="18" charset="0"/>
                                 </a:rPr>
-                                <m:t>𝑢𝑚</m:t>
+                                <m:t>𝑐</m:t>
+                              </m:r>
+                              <m:r>
+                                <a:rPr lang="en-US" altLang="zh-TW" sz="2000" b="0" i="1" smtClean="0">
+                                  <a:latin typeface="Cambria Math" panose="02040503050406030204" pitchFamily="18" charset="0"/>
+                                </a:rPr>
+                                <m:t>𝑚</m:t>
                               </m:r>
                             </m:num>
                             <m:den>
+                              <m:r>
+                                <a:rPr lang="en-US" altLang="zh-TW" sz="2000" b="0" i="1" smtClean="0">
+                                  <a:latin typeface="Cambria Math" panose="02040503050406030204" pitchFamily="18" charset="0"/>
+                                </a:rPr>
+                                <m:t>𝑝</m:t>
+                              </m:r>
                               <m:r>
                                 <a:rPr lang="en-US" altLang="zh-TW" sz="2000" b="0" i="1" smtClean="0">
                                   <a:latin typeface="Cambria Math" panose="02040503050406030204" pitchFamily="18" charset="0"/>
@@ -6361,7 +6382,7 @@
             </p:txBody>
           </p:sp>
         </mc:Choice>
-        <mc:Fallback xmlns="">
+        <mc:Fallback>
           <p:sp>
             <p:nvSpPr>
               <p:cNvPr id="3" name="內容版面配置區 2">
@@ -6386,7 +6407,7 @@
               <a:blipFill>
                 <a:blip r:embed="rId2"/>
                 <a:stretch>
-                  <a:fillRect l="-536"/>
+                  <a:fillRect l="-536" b="-1228"/>
                 </a:stretch>
               </a:blipFill>
             </p:spPr>
@@ -6435,8 +6456,8 @@
           <a:chExt cx="0" cy="0"/>
         </a:xfrm>
       </p:grpSpPr>
-      <mc:AlternateContent xmlns:mc="http://schemas.openxmlformats.org/markup-compatibility/2006" xmlns:a14="http://schemas.microsoft.com/office/drawing/2010/main">
-        <mc:Choice Requires="a14">
+      <mc:AlternateContent xmlns:mc="http://schemas.openxmlformats.org/markup-compatibility/2006">
+        <mc:Choice xmlns:a14="http://schemas.microsoft.com/office/drawing/2010/main" Requires="a14">
           <p:sp>
             <p:nvSpPr>
               <p:cNvPr id="5" name="文字方塊 4">
@@ -6732,7 +6753,7 @@
                 </a14:m>
                 <a:r>
                   <a:rPr lang="en-US" altLang="zh-TW" sz="2000" dirty="0"/>
-                  <a:t> effective cross section of Two-photon absorption effect (0.1289 um^2)</a:t>
+                  <a:t> effective cross section of Two-photon absorption effect (0.1289 x10^-8 cm^2)</a:t>
                 </a:r>
               </a:p>
               <a:p>
@@ -6879,7 +6900,15 @@
                 </a:r>
                 <a:r>
                   <a:rPr lang="en-US" altLang="zh-TW" sz="2000" dirty="0"/>
-                  <a:t>Input Laser field amplitude</a:t>
+                  <a:t>Input Laser field amplitude (unit</a:t>
+                </a:r>
+                <a:r>
+                  <a:rPr lang="zh-TW" altLang="en-US" sz="2000" dirty="0"/>
+                  <a:t>：</a:t>
+                </a:r>
+                <a:r>
+                  <a:rPr lang="en-US" altLang="zh-TW" sz="2000" dirty="0"/>
+                  <a:t>mW^0.5)</a:t>
                 </a:r>
               </a:p>
               <a:p>
@@ -6888,7 +6917,7 @@
             </p:txBody>
           </p:sp>
         </mc:Choice>
-        <mc:Fallback xmlns="">
+        <mc:Fallback>
           <p:sp>
             <p:nvSpPr>
               <p:cNvPr id="5" name="文字方塊 4">
@@ -6963,8 +6992,8 @@
           <a:chExt cx="0" cy="0"/>
         </a:xfrm>
       </p:grpSpPr>
-      <mc:AlternateContent xmlns:mc="http://schemas.openxmlformats.org/markup-compatibility/2006" xmlns:a14="http://schemas.microsoft.com/office/drawing/2010/main">
-        <mc:Choice Requires="a14">
+      <mc:AlternateContent xmlns:mc="http://schemas.openxmlformats.org/markup-compatibility/2006">
+        <mc:Choice xmlns:a14="http://schemas.microsoft.com/office/drawing/2010/main" Requires="a14">
           <p:sp>
             <p:nvSpPr>
               <p:cNvPr id="5" name="文字方塊 4">
@@ -7337,7 +7366,7 @@
                 </a:r>
                 <a:r>
                   <a:rPr lang="en-US" altLang="zh-TW" dirty="0"/>
-                  <a:t> effective cross section of Free carrier absorption (0.116 um^2)</a:t>
+                  <a:t> effective cross section of Free carrier absorption (0.116 x10^-8 cm^2)</a:t>
                 </a:r>
               </a:p>
               <a:p>
@@ -7426,7 +7455,15 @@
               <a:p>
                 <a:r>
                   <a:rPr lang="en-US" altLang="zh-TW" dirty="0"/>
-                  <a:t>Q = 2325.6759128051194</a:t>
+                  <a:t>Q = 2325.6759128051194,  </a:t>
+                </a:r>
+                <a:r>
+                  <a:rPr lang="en-US" altLang="zh-TW" dirty="0" err="1"/>
+                  <a:t>LineWidth</a:t>
+                </a:r>
+                <a:r>
+                  <a:rPr lang="en-US" altLang="zh-TW" dirty="0"/>
+                  <a:t> = 0.6705372826734959 nm</a:t>
                 </a:r>
               </a:p>
               <a:p>
@@ -7438,7 +7475,7 @@
             </p:txBody>
           </p:sp>
         </mc:Choice>
-        <mc:Fallback xmlns="">
+        <mc:Fallback>
           <p:sp>
             <p:nvSpPr>
               <p:cNvPr id="5" name="文字方塊 4">
@@ -7573,10 +7610,193 @@
           </a:prstGeom>
         </p:spPr>
       </p:pic>
+      <p:sp>
+        <p:nvSpPr>
+          <p:cNvPr id="2" name="文字方塊 1">
+            <a:extLst>
+              <a:ext uri="{FF2B5EF4-FFF2-40B4-BE49-F238E27FC236}">
+                <a16:creationId xmlns:a16="http://schemas.microsoft.com/office/drawing/2014/main" id="{CAC59B82-66B2-EA1B-4601-AF2A2098C095}"/>
+              </a:ext>
+            </a:extLst>
+          </p:cNvPr>
+          <p:cNvSpPr txBox="1"/>
+          <p:nvPr/>
+        </p:nvSpPr>
+        <p:spPr>
+          <a:xfrm>
+            <a:off x="954593" y="241160"/>
+            <a:ext cx="6631912" cy="954107"/>
+          </a:xfrm>
+          <a:prstGeom prst="rect">
+            <a:avLst/>
+          </a:prstGeom>
+          <a:noFill/>
+        </p:spPr>
+        <p:txBody>
+          <a:bodyPr wrap="square" rtlCol="0">
+            <a:spAutoFit/>
+          </a:bodyPr>
+          <a:lstStyle/>
+          <a:p>
+            <a:r>
+              <a:rPr lang="en-US" altLang="zh-TW" sz="2800" dirty="0"/>
+              <a:t>Transmission when S0 = 10^0.5  (Input Laser power = 10 </a:t>
+            </a:r>
+            <a:r>
+              <a:rPr lang="en-US" altLang="zh-TW" sz="2800" dirty="0" err="1"/>
+              <a:t>mW</a:t>
+            </a:r>
+            <a:r>
+              <a:rPr lang="en-US" altLang="zh-TW" sz="2800" dirty="0"/>
+              <a:t>)</a:t>
+            </a:r>
+            <a:endParaRPr lang="zh-TW" altLang="en-US" sz="2800" dirty="0"/>
+          </a:p>
+        </p:txBody>
+      </p:sp>
     </p:spTree>
     <p:extLst>
       <p:ext uri="{BB962C8B-B14F-4D97-AF65-F5344CB8AC3E}">
         <p14:creationId xmlns:p14="http://schemas.microsoft.com/office/powerpoint/2010/main" val="3230402140"/>
+      </p:ext>
+    </p:extLst>
+  </p:cSld>
+  <p:clrMapOvr>
+    <a:masterClrMapping/>
+  </p:clrMapOvr>
+</p:sld>
+</file>
+
+<file path=ppt/slides/slide7.xml><?xml version="1.0" encoding="utf-8"?>
+<p:sld xmlns:a="http://schemas.openxmlformats.org/drawingml/2006/main" xmlns:r="http://schemas.openxmlformats.org/officeDocument/2006/relationships" xmlns:p="http://schemas.openxmlformats.org/presentationml/2006/main">
+  <p:cSld>
+    <p:spTree>
+      <p:nvGrpSpPr>
+        <p:cNvPr id="1" name=""/>
+        <p:cNvGrpSpPr/>
+        <p:nvPr/>
+      </p:nvGrpSpPr>
+      <p:grpSpPr>
+        <a:xfrm>
+          <a:off x="0" y="0"/>
+          <a:ext cx="0" cy="0"/>
+          <a:chOff x="0" y="0"/>
+          <a:chExt cx="0" cy="0"/>
+        </a:xfrm>
+      </p:grpSpPr>
+      <p:sp>
+        <p:nvSpPr>
+          <p:cNvPr id="2" name="標題 1">
+            <a:extLst>
+              <a:ext uri="{FF2B5EF4-FFF2-40B4-BE49-F238E27FC236}">
+                <a16:creationId xmlns:a16="http://schemas.microsoft.com/office/drawing/2014/main" id="{B422E595-D90C-7CAE-ADF0-4FC79D12041B}"/>
+              </a:ext>
+            </a:extLst>
+          </p:cNvPr>
+          <p:cNvSpPr>
+            <a:spLocks noGrp="1"/>
+          </p:cNvSpPr>
+          <p:nvPr>
+            <p:ph type="title"/>
+          </p:nvPr>
+        </p:nvSpPr>
+        <p:spPr/>
+        <p:txBody>
+          <a:bodyPr/>
+          <a:lstStyle/>
+          <a:p>
+            <a:r>
+              <a:rPr lang="en-US" altLang="zh-TW" dirty="0"/>
+              <a:t>Absorption in resonance </a:t>
+            </a:r>
+            <a:endParaRPr lang="zh-TW" altLang="en-US" dirty="0"/>
+          </a:p>
+        </p:txBody>
+      </p:sp>
+      <p:sp>
+        <p:nvSpPr>
+          <p:cNvPr id="3" name="內容版面配置區 2">
+            <a:extLst>
+              <a:ext uri="{FF2B5EF4-FFF2-40B4-BE49-F238E27FC236}">
+                <a16:creationId xmlns:a16="http://schemas.microsoft.com/office/drawing/2014/main" id="{B9F6632C-158B-E1AF-1419-E1F3545C72B7}"/>
+              </a:ext>
+            </a:extLst>
+          </p:cNvPr>
+          <p:cNvSpPr>
+            <a:spLocks noGrp="1"/>
+          </p:cNvSpPr>
+          <p:nvPr>
+            <p:ph idx="1"/>
+          </p:nvPr>
+        </p:nvSpPr>
+        <p:spPr/>
+        <p:txBody>
+          <a:bodyPr/>
+          <a:lstStyle/>
+          <a:p>
+            <a:r>
+              <a:rPr lang="en-US" altLang="zh-TW" dirty="0"/>
+              <a:t>Peak two photon absorption = 0.03543669954254454 1/cm</a:t>
+            </a:r>
+          </a:p>
+          <a:p>
+            <a:r>
+              <a:rPr lang="en-US" altLang="zh-TW" dirty="0"/>
+              <a:t>Peak Free carrier absorption = 0.0632404645402325 1/cm</a:t>
+            </a:r>
+          </a:p>
+          <a:p>
+            <a:r>
+              <a:rPr lang="en-US" altLang="zh-TW" dirty="0"/>
+              <a:t>Field Linear round-trip loss = 0.9468919671731187</a:t>
+            </a:r>
+          </a:p>
+          <a:p>
+            <a:r>
+              <a:rPr lang="en-US" altLang="zh-TW" dirty="0"/>
+              <a:t>Field couple through coefficient = 0.947582</a:t>
+            </a:r>
+          </a:p>
+          <a:p>
+            <a:r>
+              <a:rPr lang="en-US" altLang="zh-TW" dirty="0"/>
+              <a:t>Photon Round Trip time : 0.41747300245552565 </a:t>
+            </a:r>
+            <a:r>
+              <a:rPr lang="en-US" altLang="zh-TW" dirty="0" err="1"/>
+              <a:t>ps</a:t>
+            </a:r>
+            <a:endParaRPr lang="en-US" altLang="zh-TW" dirty="0"/>
+          </a:p>
+          <a:p>
+            <a:r>
+              <a:rPr lang="en-US" altLang="zh-TW" dirty="0"/>
+              <a:t>Input Laser photon energy : 0.0001274983842559692 </a:t>
+            </a:r>
+            <a:r>
+              <a:rPr lang="en-US" altLang="zh-TW" dirty="0" err="1"/>
+              <a:t>fJ</a:t>
+            </a:r>
+            <a:endParaRPr lang="en-US" altLang="zh-TW" dirty="0"/>
+          </a:p>
+          <a:p>
+            <a:pPr marL="0" indent="0">
+              <a:buNone/>
+            </a:pPr>
+            <a:r>
+              <a:rPr lang="en-US" altLang="zh-TW" dirty="0"/>
+              <a:t>(Input Laser wavelength = 1.558 um)</a:t>
+            </a:r>
+          </a:p>
+          <a:p>
+            <a:endParaRPr lang="zh-TW" altLang="en-US" dirty="0"/>
+          </a:p>
+        </p:txBody>
+      </p:sp>
+    </p:spTree>
+    <p:extLst>
+      <p:ext uri="{BB962C8B-B14F-4D97-AF65-F5344CB8AC3E}">
+        <p14:creationId xmlns:p14="http://schemas.microsoft.com/office/powerpoint/2010/main" val="2351823094"/>
       </p:ext>
     </p:extLst>
   </p:cSld>
